--- a/write/507-ppt/examples/system-showcase.pptx
+++ b/write/507-ppt/examples/system-showcase.pptx
@@ -5,22 +5,22 @@
     <p:sldMasterId xmlns:r="http://schemas.openxmlformats.org/officeDocument/2006/relationships" id="2147483648" r:id="rId1"/>
   </p:sldMasterIdLst>
   <p:notesMasterIdLst>
-    <p:notesMasterId r:id="Rb3011f649f7447b2"/>
+    <p:notesMasterId r:id="Ree4163ec81134b3a"/>
   </p:notesMasterIdLst>
   <p:sldIdLst>
-    <p:sldId id="256" r:id="R8e06585661604cc6"/>
-    <p:sldId id="257" r:id="R344d8464d5ab4177"/>
-    <p:sldId id="258" r:id="Ra04ac128cf554595"/>
-    <p:sldId id="259" r:id="R83d95f77bf314ed8"/>
-    <p:sldId id="260" r:id="R7f069b6ac5244eb7"/>
-    <p:sldId id="261" r:id="Rd3b85221c4154db2"/>
-    <p:sldId id="262" r:id="Rc40475a02f2a4846"/>
-    <p:sldId id="263" r:id="R0173a6c68b1741e9"/>
-    <p:sldId id="264" r:id="R3f39173940074d3f"/>
-    <p:sldId id="265" r:id="Rd46c560316bb4469"/>
-    <p:sldId id="266" r:id="Read9397875ad460d"/>
-    <p:sldId id="267" r:id="Rb6d93f28738f4071"/>
-    <p:sldId id="268" r:id="Rb7e765b1e7b148f5"/>
+    <p:sldId id="256" r:id="R1f63e80f3a98473a"/>
+    <p:sldId id="257" r:id="R3f3709c79b334282"/>
+    <p:sldId id="258" r:id="Rc3cb57fe47f548fe"/>
+    <p:sldId id="259" r:id="R3c2ae1ce93cb498a"/>
+    <p:sldId id="260" r:id="R59765cce9df14535"/>
+    <p:sldId id="261" r:id="R1683e5d47bd14576"/>
+    <p:sldId id="262" r:id="R5a12d8fa7ac046a1"/>
+    <p:sldId id="263" r:id="R89ed568575444a3f"/>
+    <p:sldId id="264" r:id="Re1c3134686564691"/>
+    <p:sldId id="265" r:id="R77a165fbee1843d4"/>
+    <p:sldId id="266" r:id="R349b5c9ffef64841"/>
+    <p:sldId id="267" r:id="R9e1f9e2bf1d94dcd"/>
+    <p:sldId id="268" r:id="Rf53a93cb3afb4c9d"/>
   </p:sldIdLst>
   <p:sldSz cx="12192000" cy="6858000"/>
   <p:notesSz cx="6858000" cy="9144000"/>
@@ -2532,7 +2532,7 @@
         </p:xfrm>
         <a:graphic xmlns:a="http://schemas.openxmlformats.org/drawingml/2006/main">
           <a:graphicData uri="http://schemas.openxmlformats.org/drawingml/2006/chart">
-            <c:chart xmlns:r="http://schemas.openxmlformats.org/officeDocument/2006/relationships" xmlns:c="http://schemas.openxmlformats.org/drawingml/2006/chart" r:id="R5d1785eaa3454697"/>
+            <c:chart xmlns:r="http://schemas.openxmlformats.org/officeDocument/2006/relationships" xmlns:c="http://schemas.openxmlformats.org/drawingml/2006/chart" r:id="R648b3239d90c409a"/>
           </a:graphicData>
         </a:graphic>
       </p:graphicFrame>
@@ -6075,10 +6075,10 @@
           <p:nvPr/>
         </p:nvPicPr>
         <p:blipFill>
-          <a:blip xmlns:r="http://schemas.openxmlformats.org/officeDocument/2006/relationships" xmlns:a="http://schemas.openxmlformats.org/drawingml/2006/main" r:embed="R02e3fd39715a4a62">
+          <a:blip xmlns:r="http://schemas.openxmlformats.org/officeDocument/2006/relationships" xmlns:a="http://schemas.openxmlformats.org/drawingml/2006/main" r:embed="Rc9589ab1866749c6">
             <a:extLst>
               <a:ext uri="{96DAC541-7B7A-43D3-8B79-37D633B846F1}">
-                <asvg:svgBlip xmlns:asvg="http://schemas.microsoft.com/office/drawing/2016/SVG/main" r:embed="R546a0114c77b4947"/>
+                <asvg:svgBlip xmlns:asvg="http://schemas.microsoft.com/office/drawing/2016/SVG/main" r:embed="Rb9a860a7486140de"/>
               </a:ext>
             </a:extLst>
           </a:blip>
@@ -6088,8 +6088,8 @@
         </p:blipFill>
         <p:spPr>
           <a:xfrm xmlns:a="http://schemas.openxmlformats.org/drawingml/2006/main">
-            <a:off x="4140000" y="900000"/>
-            <a:ext cx="5220000" cy="3528000"/>
+            <a:off x="4140000" y="1195877"/>
+            <a:ext cx="5220000" cy="2936250"/>
           </a:xfrm>
           <a:prstGeom xmlns:a="http://schemas.openxmlformats.org/drawingml/2006/main" prst="rect">
             <a:avLst/>
